--- a/docs/agentic-architecture-deck.pptx
+++ b/docs/agentic-architecture-deck.pptx
@@ -6125,8 +6125,8 @@
         </p:nvCxnSpPr>
         <p:spPr>
           <a:xfrm>
-            <a:off x="3016173.75" y="3589020.0"/>
-            <a:ext cx="269240.0" cy="0.0"/>
+            <a:off x="3016173" y="3589020"/>
+            <a:ext cx="269240" cy="0"/>
           </a:xfrm>
           <a:prstGeom prst="bentConnector3">
             <a:avLst/>
@@ -6500,8 +6500,8 @@
         </p:nvCxnSpPr>
         <p:spPr>
           <a:xfrm>
-            <a:off x="5961227.5" y="3589020.0"/>
-            <a:ext cx="269240.0" cy="0.0"/>
+            <a:off x="5961227" y="3589020"/>
+            <a:ext cx="269240" cy="0"/>
           </a:xfrm>
           <a:prstGeom prst="bentConnector3">
             <a:avLst/>
@@ -6875,8 +6875,8 @@
         </p:nvCxnSpPr>
         <p:spPr>
           <a:xfrm>
-            <a:off x="8906281.25" y="3589020.0"/>
-            <a:ext cx="269240.0" cy="0.0"/>
+            <a:off x="8906281" y="3589020"/>
+            <a:ext cx="269240" cy="0"/>
           </a:xfrm>
           <a:prstGeom prst="bentConnector3">
             <a:avLst/>
